--- a/光和工業_組織図.pptx
+++ b/光和工業_組織図.pptx
@@ -2331,7 +2331,7 @@
                   <a:srgbClr val="8A8A8A"/>
                 </a:solidFill>
               </a:rPr>
-              <a:t>有限会社 光和工業（宮城県黒川郡大和町・1998年創業）　油谷：積水定巡を軸にサウナ・飲食・穀物乾燥機組立を横断サポート（JA新みやぎ18年・フォークリフト有）</a:t>
+              <a:t>有限会社 光和工業（宮城県黒川郡大和町・1997年創業）　油谷：積水定巡を軸にサウナ・飲食・穀物乾燥機組立を横断サポート（JA新みやぎ18年・フォークリフト有）</a:t>
             </a:r>
             <a:endParaRPr lang="en-US" sz="850" dirty="0"/>
           </a:p>
